--- a/assets/TCS302/Unit-2/Lecture19_Doubly_Linked_Lists.pptx
+++ b/assets/TCS302/Unit-2/Lecture19_Doubly_Linked_Lists.pptx
@@ -3779,7 +3779,7 @@
         <p:spPr>
           <a:xfrm>
             <a:off x="457200" y="1143000"/>
-            <a:ext cx="4846320" cy="3611880"/>
+            <a:ext cx="4572000" cy="2766060"/>
           </a:xfrm>
           <a:prstGeom prst="roundRect">
             <a:avLst>
@@ -4164,90 +4164,6 @@
                 <a:cs typeface="Calibri" pitchFamily="34" charset="-120"/>
               </a:rPr>
               <a:t>head-&gt;prev = node: the NEW link — the OLD head must now look back at the new node. Easy to forget.</a:t>
-            </a:r>
-            <a:endParaRPr lang="en-US" sz="1200" dirty="0"/>
-          </a:p>
-        </p:txBody>
-      </p:sp>
-      <p:sp>
-        <p:nvSpPr>
-          <p:cNvPr id="9" name="Shape 7"/>
-          <p:cNvSpPr/>
-          <p:nvPr/>
-        </p:nvSpPr>
-        <p:spPr>
-          <a:xfrm>
-            <a:off x="5486400" y="4434840"/>
-            <a:ext cx="3200400" cy="548640"/>
-          </a:xfrm>
-          <a:prstGeom prst="roundRect">
-            <a:avLst>
-              <a:gd name="adj" fmla="val 11667"/>
-            </a:avLst>
-          </a:prstGeom>
-          <a:solidFill>
-            <a:srgbClr val="EEF3FB"/>
-          </a:solidFill>
-          <a:ln w="12700">
-            <a:solidFill>
-              <a:srgbClr val="1E2761"/>
-            </a:solidFill>
-            <a:prstDash val="solid"/>
-          </a:ln>
-        </p:spPr>
-        <p:txBody>
-          <a:bodyPr/>
-          <a:lstStyle/>
-          <a:p>
-            <a:endParaRPr lang="en-US"/>
-          </a:p>
-        </p:txBody>
-      </p:sp>
-      <p:sp>
-        <p:nvSpPr>
-          <p:cNvPr id="10" name="Text 8"/>
-          <p:cNvSpPr/>
-          <p:nvPr/>
-        </p:nvSpPr>
-        <p:spPr>
-          <a:xfrm>
-            <a:off x="5669280" y="4434840"/>
-            <a:ext cx="2834640" cy="548640"/>
-          </a:xfrm>
-          <a:prstGeom prst="rect">
-            <a:avLst/>
-          </a:prstGeom>
-          <a:noFill/>
-          <a:ln/>
-        </p:spPr>
-        <p:txBody>
-          <a:bodyPr wrap="square" lIns="0" tIns="0" rIns="0" bIns="0" rtlCol="0" anchor="ctr"/>
-          <a:lstStyle/>
-          <a:p>
-            <a:pPr marL="0" indent="0">
-              <a:buNone/>
-            </a:pPr>
-            <a:r>
-              <a:rPr lang="en-US" sz="1200" b="1" dirty="0">
-                <a:solidFill>
-                  <a:srgbClr val="1E2761"/>
-                </a:solidFill>
-                <a:latin typeface="Calibri" pitchFamily="34" charset="0"/>
-                <a:ea typeface="Calibri" pitchFamily="34" charset="-122"/>
-                <a:cs typeface="Calibri" pitchFamily="34" charset="-120"/>
-              </a:rPr>
-              <a:t>ASK   </a:t>
-            </a:r>
-            <a:r>
-              <a:rPr lang="en-US" sz="1250" i="1" dirty="0">
-                <a:solidFill>
-                  <a:srgbClr val="2B2B2B"/>
-                </a:solidFill>
-                <a:latin typeface="Calibri" pitchFamily="34" charset="0"/>
-                <a:ea typeface="Calibri" pitchFamily="34" charset="-122"/>
-                <a:cs typeface="Calibri" pitchFamily="34" charset="-120"/>
-              </a:rPr>
-              <a:t>Why does the third line need an if (head != NULL) guard?</a:t>
             </a:r>
             <a:endParaRPr lang="en-US" sz="1200" dirty="0"/>
           </a:p>
@@ -7064,7 +6980,7 @@
         </p:nvGraphicFramePr>
         <p:xfrm>
           <a:off x="457200" y="1188720"/>
-          <a:ext cx="8229600" cy="914400"/>
+          <a:ext cx="8229600" cy="3182112"/>
         </p:xfrm>
         <a:graphic>
           <a:graphicData uri="http://schemas.openxmlformats.org/drawingml/2006/table">
@@ -8154,7 +8070,7 @@
         </p:nvGraphicFramePr>
         <p:xfrm>
           <a:off x="457200" y="1234440"/>
-          <a:ext cx="8229600" cy="914400"/>
+          <a:ext cx="8229600" cy="3072384"/>
         </p:xfrm>
         <a:graphic>
           <a:graphicData uri="http://schemas.openxmlformats.org/drawingml/2006/table">
@@ -9706,45 +9622,6 @@
               <a:t>Draw a 4-node doubly linked list (1,2,3,4). Trace deleteNode on the node holding 3 by hand — exactly which TWO pointer fields change value, and in which two nodes?</a:t>
             </a:r>
             <a:endParaRPr lang="en-US" sz="1300" dirty="0"/>
-          </a:p>
-        </p:txBody>
-      </p:sp>
-      <p:sp>
-        <p:nvSpPr>
-          <p:cNvPr id="7" name="Text 5"/>
-          <p:cNvSpPr/>
-          <p:nvPr/>
-        </p:nvSpPr>
-        <p:spPr>
-          <a:xfrm>
-            <a:off x="640080" y="4828032"/>
-            <a:ext cx="7863840" cy="256032"/>
-          </a:xfrm>
-          <a:prstGeom prst="rect">
-            <a:avLst/>
-          </a:prstGeom>
-          <a:noFill/>
-          <a:ln/>
-        </p:spPr>
-        <p:txBody>
-          <a:bodyPr wrap="square" lIns="0" tIns="0" rIns="0" bIns="0" rtlCol="0" anchor="ctr"/>
-          <a:lstStyle/>
-          <a:p>
-            <a:pPr marL="0" indent="0">
-              <a:buNone/>
-            </a:pPr>
-            <a:r>
-              <a:rPr lang="en-US" sz="1050" i="1" dirty="0">
-                <a:solidFill>
-                  <a:srgbClr val="CADCFC"/>
-                </a:solidFill>
-                <a:latin typeface="Calibri" pitchFamily="34" charset="0"/>
-                <a:ea typeface="Calibri" pitchFamily="34" charset="-122"/>
-                <a:cs typeface="Calibri" pitchFamily="34" charset="-120"/>
-              </a:rPr>
-              <a:t>Unit II complete. Next: Unit III — Trees, searching and hashing</a:t>
-            </a:r>
-            <a:endParaRPr lang="en-US" sz="1050" dirty="0"/>
           </a:p>
         </p:txBody>
       </p:sp>
